--- a/AdminWebSite.pptx
+++ b/AdminWebSite.pptx
@@ -16510,11 +16510,7 @@
             </a:r>
             <a:r>
               <a:rPr lang="ko-KR" altLang="en-US" dirty="0"/>
-              <a:t>화면 갱신 </a:t>
-            </a:r>
-            <a:r>
-              <a:rPr lang="ko-KR" altLang="en-US"/>
-              <a:t>시간 출력</a:t>
+              <a:t>화면 갱신 시간 출력</a:t>
             </a:r>
             <a:endParaRPr lang="en-US" altLang="ko-KR" dirty="0"/>
           </a:p>
